--- a/course/1회차_교안_슬라이드.pptx
+++ b/course/1회차_교안_슬라이드.pptx
@@ -2662,7 +2662,7 @@
           <a:p>
             <a:r>
               <a:rPr lang="en-US" dirty="0"/>
-              <a:t>이게 여러분 첫 스킬이에요. 오전에 쓴 GPT는 제 거고, 이건 여러분 거예요. 내일부터 카드뉴스, 이미지, 릴스 전부 이 안에서 만듭니다.</a:t>
+              <a:t>이제 이 프로젝트가 여러분 첫 스킬이에요. 오전엔 제 지침이 질문했고, 지금 올린 다섯 파일은 여러분 답이에요. 파일이 올라가면 같은 지침이 알아서 마케팅 동료로 바뀝니다.</a:t>
             </a:r>
             <a:endParaRPr lang="en-US" dirty="0"/>
           </a:p>
@@ -5477,7 +5477,7 @@
                 <a:ea typeface="Apple SD Gothic Neo" pitchFamily="34" charset="-122"/>
                 <a:cs typeface="Apple SD Gothic Neo" pitchFamily="34" charset="-120"/>
               </a:rPr>
-              <a:t>② 내 첫 스킬 (ChatGPT 프로젝트)</a:t>
+              <a:t>② 내 첫 스킬 (ChatGPT 프로젝트에 쌓인 파일)</a:t>
             </a:r>
             <a:endParaRPr lang="en-US" sz="1250" dirty="0"/>
           </a:p>
@@ -6875,7 +6875,7 @@
                 <a:ea typeface="Apple SD Gothic Neo" pitchFamily="34" charset="-122"/>
                 <a:cs typeface="Apple SD Gothic Neo" pitchFamily="34" charset="-120"/>
               </a:rPr>
-              <a:t>파일 6 → 프로젝트</a:t>
+              <a:t>파일 5 → 같은 프로젝트</a:t>
             </a:r>
             <a:endParaRPr lang="en-US" sz="1150" dirty="0"/>
           </a:p>
@@ -8324,7 +8324,7 @@
                 <a:ea typeface="Apple SD Gothic Neo" pitchFamily="34" charset="-122"/>
                 <a:cs typeface="Apple SD Gothic Neo" pitchFamily="34" charset="-120"/>
               </a:rPr>
-              <a:t>시작</a:t>
+              <a:t>시작 · 10분</a:t>
             </a:r>
             <a:endParaRPr lang="en-US" sz="1100" dirty="0"/>
           </a:p>
@@ -8363,7 +8363,7 @@
                 <a:ea typeface="Apple SD Gothic Neo" pitchFamily="34" charset="-122"/>
                 <a:cs typeface="Apple SD Gothic Neo" pitchFamily="34" charset="-120"/>
               </a:rPr>
-              <a:t>커스텀 GPT 열기</a:t>
+              <a:t>프로젝트 만들기 — 오늘 하나만</a:t>
             </a:r>
             <a:endParaRPr lang="en-US" sz="2800" dirty="0"/>
           </a:p>
@@ -8377,12 +8377,424 @@
         </p:nvSpPr>
         <p:spPr>
           <a:xfrm>
-            <a:off x="548640" y="1554480"/>
-            <a:ext cx="2743200" cy="2743200"/>
+            <a:off x="548640" y="1472184"/>
+            <a:ext cx="420624" cy="420624"/>
+          </a:xfrm>
+          <a:prstGeom prst="ellipse">
+            <a:avLst/>
+          </a:prstGeom>
+          <a:solidFill>
+            <a:srgbClr val="E8622A"/>
+          </a:solidFill>
+          <a:ln w="12700">
+            <a:solidFill>
+              <a:srgbClr val="E8622A"/>
+            </a:solidFill>
+            <a:prstDash val="solid"/>
+          </a:ln>
+        </p:spPr>
+      </p:sp>
+      <p:sp>
+        <p:nvSpPr>
+          <p:cNvPr id="6" name="Text 4"/>
+          <p:cNvSpPr txBox="1"/>
+          <p:nvPr/>
+        </p:nvSpPr>
+        <p:spPr>
+          <a:xfrm>
+            <a:off x="548640" y="1472184"/>
+            <a:ext cx="420624" cy="420624"/>
+          </a:xfrm>
+          <a:prstGeom prst="rect">
+            <a:avLst/>
+          </a:prstGeom>
+          <a:noFill/>
+          <a:ln/>
+        </p:spPr>
+        <p:txBody>
+          <a:bodyPr wrap="square" lIns="0" tIns="0" rIns="0" bIns="0" rtlCol="0" anchor="ctr"/>
+          <a:lstStyle/>
+          <a:p>
+            <a:pPr algn="ctr" indent="0" marL="0">
+              <a:buNone/>
+            </a:pPr>
+            <a:r>
+              <a:rPr lang="en-US" sz="1400" b="1" dirty="0">
+                <a:solidFill>
+                  <a:srgbClr val="FFFFFF"/>
+                </a:solidFill>
+                <a:latin typeface="Apple SD Gothic Neo" pitchFamily="34" charset="0"/>
+                <a:ea typeface="Apple SD Gothic Neo" pitchFamily="34" charset="-122"/>
+                <a:cs typeface="Apple SD Gothic Neo" pitchFamily="34" charset="-120"/>
+              </a:rPr>
+              <a:t>1</a:t>
+            </a:r>
+            <a:endParaRPr lang="en-US" sz="1400" dirty="0"/>
+          </a:p>
+        </p:txBody>
+      </p:sp>
+      <p:sp>
+        <p:nvSpPr>
+          <p:cNvPr id="7" name="Text 5"/>
+          <p:cNvSpPr txBox="1"/>
+          <p:nvPr/>
+        </p:nvSpPr>
+        <p:spPr>
+          <a:xfrm>
+            <a:off x="1143000" y="1417320"/>
+            <a:ext cx="4754880" cy="530352"/>
+          </a:xfrm>
+          <a:prstGeom prst="rect">
+            <a:avLst/>
+          </a:prstGeom>
+          <a:noFill/>
+          <a:ln/>
+        </p:spPr>
+        <p:txBody>
+          <a:bodyPr wrap="square" lIns="0" tIns="0" rIns="0" bIns="0" rtlCol="0" anchor="ctr"/>
+          <a:lstStyle/>
+          <a:p>
+            <a:pPr indent="0" marL="0">
+              <a:buNone/>
+            </a:pPr>
+            <a:r>
+              <a:rPr lang="en-US" sz="1400" dirty="0">
+                <a:solidFill>
+                  <a:srgbClr val="FFFFFF"/>
+                </a:solidFill>
+                <a:latin typeface="Apple SD Gothic Neo" pitchFamily="34" charset="0"/>
+                <a:ea typeface="Apple SD Gothic Neo" pitchFamily="34" charset="-122"/>
+                <a:cs typeface="Apple SD Gothic Neo" pitchFamily="34" charset="-120"/>
+              </a:rPr>
+              <a:t>ChatGPT 왼쪽 「프로젝트」 → 「새 프로젝트」 → 이름 「(상호) 마케팅」</a:t>
+            </a:r>
+            <a:endParaRPr lang="en-US" sz="1400" dirty="0"/>
+          </a:p>
+        </p:txBody>
+      </p:sp>
+      <p:sp>
+        <p:nvSpPr>
+          <p:cNvPr id="8" name="Shape 6"/>
+          <p:cNvSpPr/>
+          <p:nvPr/>
+        </p:nvSpPr>
+        <p:spPr>
+          <a:xfrm>
+            <a:off x="548640" y="2039112"/>
+            <a:ext cx="420624" cy="420624"/>
+          </a:xfrm>
+          <a:prstGeom prst="ellipse">
+            <a:avLst/>
+          </a:prstGeom>
+          <a:solidFill>
+            <a:srgbClr val="E8622A"/>
+          </a:solidFill>
+          <a:ln w="12700">
+            <a:solidFill>
+              <a:srgbClr val="E8622A"/>
+            </a:solidFill>
+            <a:prstDash val="solid"/>
+          </a:ln>
+        </p:spPr>
+      </p:sp>
+      <p:sp>
+        <p:nvSpPr>
+          <p:cNvPr id="9" name="Text 7"/>
+          <p:cNvSpPr txBox="1"/>
+          <p:nvPr/>
+        </p:nvSpPr>
+        <p:spPr>
+          <a:xfrm>
+            <a:off x="548640" y="2039112"/>
+            <a:ext cx="420624" cy="420624"/>
+          </a:xfrm>
+          <a:prstGeom prst="rect">
+            <a:avLst/>
+          </a:prstGeom>
+          <a:noFill/>
+          <a:ln/>
+        </p:spPr>
+        <p:txBody>
+          <a:bodyPr wrap="square" lIns="0" tIns="0" rIns="0" bIns="0" rtlCol="0" anchor="ctr"/>
+          <a:lstStyle/>
+          <a:p>
+            <a:pPr algn="ctr" indent="0" marL="0">
+              <a:buNone/>
+            </a:pPr>
+            <a:r>
+              <a:rPr lang="en-US" sz="1400" b="1" dirty="0">
+                <a:solidFill>
+                  <a:srgbClr val="FFFFFF"/>
+                </a:solidFill>
+                <a:latin typeface="Apple SD Gothic Neo" pitchFamily="34" charset="0"/>
+                <a:ea typeface="Apple SD Gothic Neo" pitchFamily="34" charset="-122"/>
+                <a:cs typeface="Apple SD Gothic Neo" pitchFamily="34" charset="-120"/>
+              </a:rPr>
+              <a:t>2</a:t>
+            </a:r>
+            <a:endParaRPr lang="en-US" sz="1400" dirty="0"/>
+          </a:p>
+        </p:txBody>
+      </p:sp>
+      <p:sp>
+        <p:nvSpPr>
+          <p:cNvPr id="10" name="Text 8"/>
+          <p:cNvSpPr txBox="1"/>
+          <p:nvPr/>
+        </p:nvSpPr>
+        <p:spPr>
+          <a:xfrm>
+            <a:off x="1143000" y="1984248"/>
+            <a:ext cx="4754880" cy="530352"/>
+          </a:xfrm>
+          <a:prstGeom prst="rect">
+            <a:avLst/>
+          </a:prstGeom>
+          <a:noFill/>
+          <a:ln/>
+        </p:spPr>
+        <p:txBody>
+          <a:bodyPr wrap="square" lIns="0" tIns="0" rIns="0" bIns="0" rtlCol="0" anchor="ctr"/>
+          <a:lstStyle/>
+          <a:p>
+            <a:pPr indent="0" marL="0">
+              <a:buNone/>
+            </a:pPr>
+            <a:r>
+              <a:rPr lang="en-US" sz="1400" dirty="0">
+                <a:solidFill>
+                  <a:srgbClr val="FFFFFF"/>
+                </a:solidFill>
+                <a:latin typeface="Apple SD Gothic Neo" pitchFamily="34" charset="0"/>
+                <a:ea typeface="Apple SD Gothic Neo" pitchFamily="34" charset="-122"/>
+                <a:cs typeface="Apple SD Gothic Neo" pitchFamily="34" charset="-120"/>
+              </a:rPr>
+              <a:t>「지침」 열기 → 단톡방의 지침 파일 내용 전부 붙여넣기 → 저장</a:t>
+            </a:r>
+            <a:endParaRPr lang="en-US" sz="1400" dirty="0"/>
+          </a:p>
+        </p:txBody>
+      </p:sp>
+      <p:sp>
+        <p:nvSpPr>
+          <p:cNvPr id="11" name="Shape 9"/>
+          <p:cNvSpPr/>
+          <p:nvPr/>
+        </p:nvSpPr>
+        <p:spPr>
+          <a:xfrm>
+            <a:off x="548640" y="2606040"/>
+            <a:ext cx="420624" cy="420624"/>
+          </a:xfrm>
+          <a:prstGeom prst="ellipse">
+            <a:avLst/>
+          </a:prstGeom>
+          <a:solidFill>
+            <a:srgbClr val="E8622A"/>
+          </a:solidFill>
+          <a:ln w="12700">
+            <a:solidFill>
+              <a:srgbClr val="E8622A"/>
+            </a:solidFill>
+            <a:prstDash val="solid"/>
+          </a:ln>
+        </p:spPr>
+      </p:sp>
+      <p:sp>
+        <p:nvSpPr>
+          <p:cNvPr id="12" name="Text 10"/>
+          <p:cNvSpPr txBox="1"/>
+          <p:nvPr/>
+        </p:nvSpPr>
+        <p:spPr>
+          <a:xfrm>
+            <a:off x="548640" y="2606040"/>
+            <a:ext cx="420624" cy="420624"/>
+          </a:xfrm>
+          <a:prstGeom prst="rect">
+            <a:avLst/>
+          </a:prstGeom>
+          <a:noFill/>
+          <a:ln/>
+        </p:spPr>
+        <p:txBody>
+          <a:bodyPr wrap="square" lIns="0" tIns="0" rIns="0" bIns="0" rtlCol="0" anchor="ctr"/>
+          <a:lstStyle/>
+          <a:p>
+            <a:pPr algn="ctr" indent="0" marL="0">
+              <a:buNone/>
+            </a:pPr>
+            <a:r>
+              <a:rPr lang="en-US" sz="1400" b="1" dirty="0">
+                <a:solidFill>
+                  <a:srgbClr val="FFFFFF"/>
+                </a:solidFill>
+                <a:latin typeface="Apple SD Gothic Neo" pitchFamily="34" charset="0"/>
+                <a:ea typeface="Apple SD Gothic Neo" pitchFamily="34" charset="-122"/>
+                <a:cs typeface="Apple SD Gothic Neo" pitchFamily="34" charset="-120"/>
+              </a:rPr>
+              <a:t>3</a:t>
+            </a:r>
+            <a:endParaRPr lang="en-US" sz="1400" dirty="0"/>
+          </a:p>
+        </p:txBody>
+      </p:sp>
+      <p:sp>
+        <p:nvSpPr>
+          <p:cNvPr id="13" name="Text 11"/>
+          <p:cNvSpPr txBox="1"/>
+          <p:nvPr/>
+        </p:nvSpPr>
+        <p:spPr>
+          <a:xfrm>
+            <a:off x="1143000" y="2551176"/>
+            <a:ext cx="4754880" cy="530352"/>
+          </a:xfrm>
+          <a:prstGeom prst="rect">
+            <a:avLst/>
+          </a:prstGeom>
+          <a:noFill/>
+          <a:ln/>
+        </p:spPr>
+        <p:txBody>
+          <a:bodyPr wrap="square" lIns="0" tIns="0" rIns="0" bIns="0" rtlCol="0" anchor="ctr"/>
+          <a:lstStyle/>
+          <a:p>
+            <a:pPr indent="0" marL="0">
+              <a:buNone/>
+            </a:pPr>
+            <a:r>
+              <a:rPr lang="en-US" sz="1400" dirty="0">
+                <a:solidFill>
+                  <a:srgbClr val="FFFFFF"/>
+                </a:solidFill>
+                <a:latin typeface="Apple SD Gothic Neo" pitchFamily="34" charset="0"/>
+                <a:ea typeface="Apple SD Gothic Neo" pitchFamily="34" charset="-122"/>
+                <a:cs typeface="Apple SD Gothic Neo" pitchFamily="34" charset="-120"/>
+              </a:rPr>
+              <a:t>「파일」 → 참조 묶음 파일 한 개 올리기</a:t>
+            </a:r>
+            <a:endParaRPr lang="en-US" sz="1400" dirty="0"/>
+          </a:p>
+        </p:txBody>
+      </p:sp>
+      <p:sp>
+        <p:nvSpPr>
+          <p:cNvPr id="14" name="Shape 12"/>
+          <p:cNvSpPr/>
+          <p:nvPr/>
+        </p:nvSpPr>
+        <p:spPr>
+          <a:xfrm>
+            <a:off x="548640" y="3172968"/>
+            <a:ext cx="420624" cy="420624"/>
+          </a:xfrm>
+          <a:prstGeom prst="ellipse">
+            <a:avLst/>
+          </a:prstGeom>
+          <a:solidFill>
+            <a:srgbClr val="E8622A"/>
+          </a:solidFill>
+          <a:ln w="12700">
+            <a:solidFill>
+              <a:srgbClr val="E8622A"/>
+            </a:solidFill>
+            <a:prstDash val="solid"/>
+          </a:ln>
+        </p:spPr>
+      </p:sp>
+      <p:sp>
+        <p:nvSpPr>
+          <p:cNvPr id="15" name="Text 13"/>
+          <p:cNvSpPr txBox="1"/>
+          <p:nvPr/>
+        </p:nvSpPr>
+        <p:spPr>
+          <a:xfrm>
+            <a:off x="548640" y="3172968"/>
+            <a:ext cx="420624" cy="420624"/>
+          </a:xfrm>
+          <a:prstGeom prst="rect">
+            <a:avLst/>
+          </a:prstGeom>
+          <a:noFill/>
+          <a:ln/>
+        </p:spPr>
+        <p:txBody>
+          <a:bodyPr wrap="square" lIns="0" tIns="0" rIns="0" bIns="0" rtlCol="0" anchor="ctr"/>
+          <a:lstStyle/>
+          <a:p>
+            <a:pPr algn="ctr" indent="0" marL="0">
+              <a:buNone/>
+            </a:pPr>
+            <a:r>
+              <a:rPr lang="en-US" sz="1400" b="1" dirty="0">
+                <a:solidFill>
+                  <a:srgbClr val="FFFFFF"/>
+                </a:solidFill>
+                <a:latin typeface="Apple SD Gothic Neo" pitchFamily="34" charset="0"/>
+                <a:ea typeface="Apple SD Gothic Neo" pitchFamily="34" charset="-122"/>
+                <a:cs typeface="Apple SD Gothic Neo" pitchFamily="34" charset="-120"/>
+              </a:rPr>
+              <a:t>4</a:t>
+            </a:r>
+            <a:endParaRPr lang="en-US" sz="1400" dirty="0"/>
+          </a:p>
+        </p:txBody>
+      </p:sp>
+      <p:sp>
+        <p:nvSpPr>
+          <p:cNvPr id="16" name="Text 14"/>
+          <p:cNvSpPr txBox="1"/>
+          <p:nvPr/>
+        </p:nvSpPr>
+        <p:spPr>
+          <a:xfrm>
+            <a:off x="1143000" y="3118104"/>
+            <a:ext cx="4754880" cy="530352"/>
+          </a:xfrm>
+          <a:prstGeom prst="rect">
+            <a:avLst/>
+          </a:prstGeom>
+          <a:noFill/>
+          <a:ln/>
+        </p:spPr>
+        <p:txBody>
+          <a:bodyPr wrap="square" lIns="0" tIns="0" rIns="0" bIns="0" rtlCol="0" anchor="ctr"/>
+          <a:lstStyle/>
+          <a:p>
+            <a:pPr indent="0" marL="0">
+              <a:buNone/>
+            </a:pPr>
+            <a:r>
+              <a:rPr lang="en-US" sz="1400" dirty="0">
+                <a:solidFill>
+                  <a:srgbClr val="FFFFFF"/>
+                </a:solidFill>
+                <a:latin typeface="Apple SD Gothic Neo" pitchFamily="34" charset="0"/>
+                <a:ea typeface="Apple SD Gothic Neo" pitchFamily="34" charset="-122"/>
+                <a:cs typeface="Apple SD Gothic Neo" pitchFamily="34" charset="-120"/>
+              </a:rPr>
+              <a:t>새 대화에 시작 문구</a:t>
+            </a:r>
+            <a:endParaRPr lang="en-US" sz="1400" dirty="0"/>
+          </a:p>
+        </p:txBody>
+      </p:sp>
+      <p:sp>
+        <p:nvSpPr>
+          <p:cNvPr id="17" name="Shape 15"/>
+          <p:cNvSpPr/>
+          <p:nvPr/>
+        </p:nvSpPr>
+        <p:spPr>
+          <a:xfrm>
+            <a:off x="6126480" y="1417320"/>
+            <a:ext cx="2468880" cy="1051560"/>
           </a:xfrm>
           <a:prstGeom prst="roundRect">
             <a:avLst>
-              <a:gd name="adj" fmla="val 3333"/>
+              <a:gd name="adj" fmla="val 6957"/>
             </a:avLst>
           </a:prstGeom>
           <a:solidFill>
@@ -8398,14 +8810,14 @@
       </p:sp>
       <p:sp>
         <p:nvSpPr>
-          <p:cNvPr id="6" name="Text 4"/>
-          <p:cNvSpPr txBox="1"/>
-          <p:nvPr/>
-        </p:nvSpPr>
-        <p:spPr>
-          <a:xfrm>
-            <a:off x="548640" y="1554480"/>
-            <a:ext cx="2743200" cy="2743200"/>
+          <p:cNvPr id="18" name="Text 16"/>
+          <p:cNvSpPr txBox="1"/>
+          <p:nvPr/>
+        </p:nvSpPr>
+        <p:spPr>
+          <a:xfrm>
+            <a:off x="6217920" y="1417320"/>
+            <a:ext cx="2286000" cy="1051560"/>
           </a:xfrm>
           <a:prstGeom prst="rect">
             <a:avLst/>
@@ -8421,47 +8833,74 @@
               <a:buNone/>
             </a:pPr>
             <a:r>
-              <a:rPr lang="en-US" sz="1400" dirty="0">
-                <a:solidFill>
-                  <a:srgbClr val="6E6E6E"/>
-                </a:solidFill>
-                <a:latin typeface="Apple SD Gothic Neo" pitchFamily="34" charset="0"/>
-                <a:ea typeface="Apple SD Gothic Neo" pitchFamily="34" charset="-122"/>
-                <a:cs typeface="Apple SD Gothic Neo" pitchFamily="34" charset="-120"/>
-              </a:rPr>
-              <a:t>GPT 링크 QR</a:t>
-            </a:r>
-            <a:endParaRPr lang="en-US" sz="1400" dirty="0"/>
+              <a:rPr lang="en-US" sz="1500" b="1" dirty="0">
+                <a:solidFill>
+                  <a:srgbClr val="222222"/>
+                </a:solidFill>
+                <a:latin typeface="Apple SD Gothic Neo" pitchFamily="34" charset="0"/>
+                <a:ea typeface="Apple SD Gothic Neo" pitchFamily="34" charset="-122"/>
+                <a:cs typeface="Apple SD Gothic Neo" pitchFamily="34" charset="-120"/>
+              </a:rPr>
+              <a:t>"비즈니스 GTM 코어</a:t>
+            </a:r>
+            <a:endParaRPr lang="en-US" sz="1500" dirty="0"/>
           </a:p>
           <a:p>
             <a:pPr algn="ctr" indent="0" marL="0">
               <a:buNone/>
             </a:pPr>
             <a:r>
-              <a:rPr lang="en-US" sz="1400" dirty="0">
-                <a:solidFill>
-                  <a:srgbClr val="6E6E6E"/>
-                </a:solidFill>
-                <a:latin typeface="Apple SD Gothic Neo" pitchFamily="34" charset="0"/>
-                <a:ea typeface="Apple SD Gothic Neo" pitchFamily="34" charset="-122"/>
-                <a:cs typeface="Apple SD Gothic Neo" pitchFamily="34" charset="-120"/>
-              </a:rPr>
-              <a:t>(전날 삽입)</a:t>
-            </a:r>
-            <a:endParaRPr lang="en-US" sz="1400" dirty="0"/>
-          </a:p>
-        </p:txBody>
-      </p:sp>
-      <p:sp>
-        <p:nvSpPr>
-          <p:cNvPr id="7" name="Text 5"/>
-          <p:cNvSpPr txBox="1"/>
-          <p:nvPr/>
-        </p:nvSpPr>
-        <p:spPr>
-          <a:xfrm>
-            <a:off x="3657600" y="1645920"/>
-            <a:ext cx="4937760" cy="365760"/>
+              <a:rPr lang="en-US" sz="1500" b="1" dirty="0">
+                <a:solidFill>
+                  <a:srgbClr val="222222"/>
+                </a:solidFill>
+                <a:latin typeface="Apple SD Gothic Neo" pitchFamily="34" charset="0"/>
+                <a:ea typeface="Apple SD Gothic Neo" pitchFamily="34" charset="-122"/>
+                <a:cs typeface="Apple SD Gothic Neo" pitchFamily="34" charset="-120"/>
+              </a:rPr>
+              <a:t>시작할게요"</a:t>
+            </a:r>
+            <a:endParaRPr lang="en-US" sz="1500" dirty="0"/>
+          </a:p>
+        </p:txBody>
+      </p:sp>
+      <p:sp>
+        <p:nvSpPr>
+          <p:cNvPr id="19" name="Shape 17"/>
+          <p:cNvSpPr/>
+          <p:nvPr/>
+        </p:nvSpPr>
+        <p:spPr>
+          <a:xfrm>
+            <a:off x="6126480" y="2606040"/>
+            <a:ext cx="2468880" cy="1051560"/>
+          </a:xfrm>
+          <a:prstGeom prst="roundRect">
+            <a:avLst>
+              <a:gd name="adj" fmla="val 6957"/>
+            </a:avLst>
+          </a:prstGeom>
+          <a:solidFill>
+            <a:srgbClr val="FBE9E0"/>
+          </a:solidFill>
+          <a:ln w="12700">
+            <a:solidFill>
+              <a:srgbClr val="FBE9E0"/>
+            </a:solidFill>
+            <a:prstDash val="solid"/>
+          </a:ln>
+        </p:spPr>
+      </p:sp>
+      <p:sp>
+        <p:nvSpPr>
+          <p:cNvPr id="20" name="Text 18"/>
+          <p:cNvSpPr txBox="1"/>
+          <p:nvPr/>
+        </p:nvSpPr>
+        <p:spPr>
+          <a:xfrm>
+            <a:off x="6217920" y="2606040"/>
+            <a:ext cx="2286000" cy="1051560"/>
           </a:xfrm>
           <a:prstGeom prst="rect">
             <a:avLst/>
@@ -8473,34 +8912,51 @@
           <a:bodyPr wrap="square" lIns="0" tIns="0" rIns="0" bIns="0" rtlCol="0" anchor="ctr"/>
           <a:lstStyle/>
           <a:p>
-            <a:pPr indent="0" marL="0">
-              <a:buNone/>
-            </a:pPr>
-            <a:r>
-              <a:rPr lang="en-US" sz="1400" dirty="0">
-                <a:solidFill>
-                  <a:srgbClr val="CFCFCF"/>
-                </a:solidFill>
-                <a:latin typeface="Apple SD Gothic Neo" pitchFamily="34" charset="0"/>
-                <a:ea typeface="Apple SD Gothic Neo" pitchFamily="34" charset="-122"/>
-                <a:cs typeface="Apple SD Gothic Neo" pitchFamily="34" charset="-120"/>
-              </a:rPr>
-              <a:t>시작 문구를 그대로 쳐주세요</a:t>
-            </a:r>
-            <a:endParaRPr lang="en-US" sz="1400" dirty="0"/>
-          </a:p>
-        </p:txBody>
-      </p:sp>
-      <p:sp>
-        <p:nvSpPr>
-          <p:cNvPr id="8" name="Text 6"/>
-          <p:cNvSpPr txBox="1"/>
-          <p:nvPr/>
-        </p:nvSpPr>
-        <p:spPr>
-          <a:xfrm>
-            <a:off x="3657600" y="2103120"/>
-            <a:ext cx="4937760" cy="548640"/>
+            <a:pPr algn="ctr" indent="0" marL="0">
+              <a:buNone/>
+            </a:pPr>
+            <a:r>
+              <a:rPr lang="en-US" sz="1250" b="1" dirty="0">
+                <a:solidFill>
+                  <a:srgbClr val="222222"/>
+                </a:solidFill>
+                <a:latin typeface="Apple SD Gothic Neo" pitchFamily="34" charset="0"/>
+                <a:ea typeface="Apple SD Gothic Neo" pitchFamily="34" charset="-122"/>
+                <a:cs typeface="Apple SD Gothic Neo" pitchFamily="34" charset="-120"/>
+              </a:rPr>
+              <a:t>창업 준비 중이면</a:t>
+            </a:r>
+            <a:endParaRPr lang="en-US" sz="1250" dirty="0"/>
+          </a:p>
+          <a:p>
+            <a:pPr algn="ctr" indent="0" marL="0">
+              <a:buNone/>
+            </a:pPr>
+            <a:r>
+              <a:rPr lang="en-US" sz="1250" b="1" dirty="0">
+                <a:solidFill>
+                  <a:srgbClr val="222222"/>
+                </a:solidFill>
+                <a:latin typeface="Apple SD Gothic Neo" pitchFamily="34" charset="0"/>
+                <a:ea typeface="Apple SD Gothic Neo" pitchFamily="34" charset="-122"/>
+                <a:cs typeface="Apple SD Gothic Neo" pitchFamily="34" charset="-120"/>
+              </a:rPr>
+              <a:t>"창업 준비 중인데 시작할게요"</a:t>
+            </a:r>
+            <a:endParaRPr lang="en-US" sz="1250" dirty="0"/>
+          </a:p>
+        </p:txBody>
+      </p:sp>
+      <p:sp>
+        <p:nvSpPr>
+          <p:cNvPr id="21" name="Text 19"/>
+          <p:cNvSpPr txBox="1"/>
+          <p:nvPr/>
+        </p:nvSpPr>
+        <p:spPr>
+          <a:xfrm>
+            <a:off x="548640" y="3931920"/>
+            <a:ext cx="8046720" cy="548640"/>
           </a:xfrm>
           <a:prstGeom prst="rect">
             <a:avLst/>
@@ -8516,123 +8972,6 @@
               <a:buNone/>
             </a:pPr>
             <a:r>
-              <a:rPr lang="en-US" sz="2000" b="1" dirty="0">
-                <a:solidFill>
-                  <a:srgbClr val="FFFFFF"/>
-                </a:solidFill>
-                <a:latin typeface="Apple SD Gothic Neo" pitchFamily="34" charset="0"/>
-                <a:ea typeface="Apple SD Gothic Neo" pitchFamily="34" charset="-122"/>
-                <a:cs typeface="Apple SD Gothic Neo" pitchFamily="34" charset="-120"/>
-              </a:rPr>
-              <a:t>"비즈니스 GTM 코어 시작할게요"</a:t>
-            </a:r>
-            <a:endParaRPr lang="en-US" sz="2000" dirty="0"/>
-          </a:p>
-        </p:txBody>
-      </p:sp>
-      <p:sp>
-        <p:nvSpPr>
-          <p:cNvPr id="9" name="Text 7"/>
-          <p:cNvSpPr txBox="1"/>
-          <p:nvPr/>
-        </p:nvSpPr>
-        <p:spPr>
-          <a:xfrm>
-            <a:off x="3657600" y="2834640"/>
-            <a:ext cx="4937760" cy="365760"/>
-          </a:xfrm>
-          <a:prstGeom prst="rect">
-            <a:avLst/>
-          </a:prstGeom>
-          <a:noFill/>
-          <a:ln/>
-        </p:spPr>
-        <p:txBody>
-          <a:bodyPr wrap="square" lIns="0" tIns="0" rIns="0" bIns="0" rtlCol="0" anchor="ctr"/>
-          <a:lstStyle/>
-          <a:p>
-            <a:pPr indent="0" marL="0">
-              <a:buNone/>
-            </a:pPr>
-            <a:r>
-              <a:rPr lang="en-US" sz="1400" dirty="0">
-                <a:solidFill>
-                  <a:srgbClr val="CFCFCF"/>
-                </a:solidFill>
-                <a:latin typeface="Apple SD Gothic Neo" pitchFamily="34" charset="0"/>
-                <a:ea typeface="Apple SD Gothic Neo" pitchFamily="34" charset="-122"/>
-                <a:cs typeface="Apple SD Gothic Neo" pitchFamily="34" charset="-120"/>
-              </a:rPr>
-              <a:t>창업 준비 중이면</a:t>
-            </a:r>
-            <a:endParaRPr lang="en-US" sz="1400" dirty="0"/>
-          </a:p>
-        </p:txBody>
-      </p:sp>
-      <p:sp>
-        <p:nvSpPr>
-          <p:cNvPr id="10" name="Text 8"/>
-          <p:cNvSpPr txBox="1"/>
-          <p:nvPr/>
-        </p:nvSpPr>
-        <p:spPr>
-          <a:xfrm>
-            <a:off x="3657600" y="3246120"/>
-            <a:ext cx="4937760" cy="548640"/>
-          </a:xfrm>
-          <a:prstGeom prst="rect">
-            <a:avLst/>
-          </a:prstGeom>
-          <a:noFill/>
-          <a:ln/>
-        </p:spPr>
-        <p:txBody>
-          <a:bodyPr wrap="square" lIns="0" tIns="0" rIns="0" bIns="0" rtlCol="0" anchor="ctr"/>
-          <a:lstStyle/>
-          <a:p>
-            <a:pPr indent="0" marL="0">
-              <a:buNone/>
-            </a:pPr>
-            <a:r>
-              <a:rPr lang="en-US" sz="2000" b="1" dirty="0">
-                <a:solidFill>
-                  <a:srgbClr val="FFFFFF"/>
-                </a:solidFill>
-                <a:latin typeface="Apple SD Gothic Neo" pitchFamily="34" charset="0"/>
-                <a:ea typeface="Apple SD Gothic Neo" pitchFamily="34" charset="-122"/>
-                <a:cs typeface="Apple SD Gothic Neo" pitchFamily="34" charset="-120"/>
-              </a:rPr>
-              <a:t>"창업 준비 중인데 시작할게요"</a:t>
-            </a:r>
-            <a:endParaRPr lang="en-US" sz="2000" dirty="0"/>
-          </a:p>
-        </p:txBody>
-      </p:sp>
-      <p:sp>
-        <p:nvSpPr>
-          <p:cNvPr id="11" name="Text 9"/>
-          <p:cNvSpPr txBox="1"/>
-          <p:nvPr/>
-        </p:nvSpPr>
-        <p:spPr>
-          <a:xfrm>
-            <a:off x="3657600" y="4023360"/>
-            <a:ext cx="4937760" cy="365760"/>
-          </a:xfrm>
-          <a:prstGeom prst="rect">
-            <a:avLst/>
-          </a:prstGeom>
-          <a:noFill/>
-          <a:ln/>
-        </p:spPr>
-        <p:txBody>
-          <a:bodyPr wrap="square" lIns="0" tIns="0" rIns="0" bIns="0" rtlCol="0" anchor="ctr"/>
-          <a:lstStyle/>
-          <a:p>
-            <a:pPr indent="0" marL="0">
-              <a:buNone/>
-            </a:pPr>
-            <a:r>
               <a:rPr lang="en-US" sz="1300" b="1" dirty="0">
                 <a:solidFill>
                   <a:srgbClr val="E8622A"/>
@@ -8641,7 +8980,7 @@
                 <a:ea typeface="Apple SD Gothic Neo" pitchFamily="34" charset="-122"/>
                 <a:cs typeface="Apple SD Gothic Neo" pitchFamily="34" charset="-120"/>
               </a:rPr>
-              <a:t>GPT가 첫 질문을 던지면 손 들어주세요</a:t>
+              <a:t>첫 질문이 뜨면 손 들어주세요. 「프로젝트」 메뉴가 없으면 웹(chatgpt.com)으로.</a:t>
             </a:r>
             <a:endParaRPr lang="en-US" sz="1300" dirty="0"/>
           </a:p>
@@ -10150,6 +10489,45 @@
                 <a:cs typeface="Apple SD Gothic Neo" pitchFamily="34" charset="-120"/>
               </a:rPr>
               <a:t>실제 문장. 가치 힌트</a:t>
+            </a:r>
+            <a:endParaRPr lang="en-US" sz="1200" dirty="0"/>
+          </a:p>
+        </p:txBody>
+      </p:sp>
+      <p:sp>
+        <p:nvSpPr>
+          <p:cNvPr id="21" name="Text 19"/>
+          <p:cNvSpPr txBox="1"/>
+          <p:nvPr/>
+        </p:nvSpPr>
+        <p:spPr>
+          <a:xfrm>
+            <a:off x="548640" y="4526280"/>
+            <a:ext cx="8046720" cy="320040"/>
+          </a:xfrm>
+          <a:prstGeom prst="rect">
+            <a:avLst/>
+          </a:prstGeom>
+          <a:noFill/>
+          <a:ln/>
+        </p:spPr>
+        <p:txBody>
+          <a:bodyPr wrap="square" lIns="0" tIns="0" rIns="0" bIns="0" rtlCol="0" anchor="ctr"/>
+          <a:lstStyle/>
+          <a:p>
+            <a:pPr indent="0" marL="0">
+              <a:buNone/>
+            </a:pPr>
+            <a:r>
+              <a:rPr lang="en-US" sz="1200" b="1" dirty="0">
+                <a:solidFill>
+                  <a:srgbClr val="E8622A"/>
+                </a:solidFill>
+                <a:latin typeface="Apple SD Gothic Neo" pitchFamily="34" charset="0"/>
+                <a:ea typeface="Apple SD Gothic Neo" pitchFamily="34" charset="-122"/>
+                <a:cs typeface="Apple SD Gothic Neo" pitchFamily="34" charset="-120"/>
+              </a:rPr>
+              <a:t>[조사] 소개 뒤에 상호로 한 번 검색해요. 이미 올라온 리뷰가 있으면 재료가 됩니다. 5분.</a:t>
             </a:r>
             <a:endParaRPr lang="en-US" sz="1200" dirty="0"/>
           </a:p>
@@ -15964,7 +16342,7 @@
               <a:buNone/>
             </a:pPr>
             <a:r>
-              <a:rPr lang="en-US" sz="1500" b="1" dirty="0">
+              <a:rPr lang="en-US" sz="1400" b="1" dirty="0">
                 <a:solidFill>
                   <a:srgbClr val="222222"/>
                 </a:solidFill>
@@ -15972,9 +16350,9 @@
                 <a:ea typeface="Apple SD Gothic Neo" pitchFamily="34" charset="-122"/>
                 <a:cs typeface="Apple SD Gothic Neo" pitchFamily="34" charset="-120"/>
               </a:rPr>
-              <a:t>말하면 안 되는 것</a:t>
-            </a:r>
-            <a:endParaRPr lang="en-US" sz="1500" dirty="0"/>
+              <a:t>말하면 안 되는 것 — [조사]로 찾는다</a:t>
+            </a:r>
+            <a:endParaRPr lang="en-US" sz="1400" dirty="0"/>
           </a:p>
         </p:txBody>
       </p:sp>
@@ -16006,7 +16384,7 @@
               <a:buNone/>
             </a:pPr>
             <a:r>
-              <a:rPr lang="en-US" sz="1300" dirty="0">
+              <a:rPr lang="en-US" sz="1250" dirty="0">
                 <a:solidFill>
                   <a:srgbClr val="6E6E6E"/>
                 </a:solidFill>
@@ -16014,9 +16392,9 @@
                 <a:ea typeface="Apple SD Gothic Neo" pitchFamily="34" charset="-122"/>
                 <a:cs typeface="Apple SD Gothic Neo" pitchFamily="34" charset="-120"/>
               </a:rPr>
-              <a:t>증명 못 하는 최초 · 최고 · 유일 · 1등</a:t>
-            </a:r>
-            <a:endParaRPr lang="en-US" sz="1300" dirty="0"/>
+              <a:t>시트를 받으면 우리 업종 규정을 웹에서 찾아요</a:t>
+            </a:r>
+            <a:endParaRPr lang="en-US" sz="1250" dirty="0"/>
           </a:p>
           <a:p>
             <a:pPr indent="0" marL="0">
@@ -16026,7 +16404,7 @@
               <a:buNone/>
             </a:pPr>
             <a:r>
-              <a:rPr lang="en-US" sz="1300" dirty="0">
+              <a:rPr lang="en-US" sz="1250" dirty="0">
                 <a:solidFill>
                   <a:srgbClr val="6E6E6E"/>
                 </a:solidFill>
@@ -16034,9 +16412,9 @@
                 <a:ea typeface="Apple SD Gothic Neo" pitchFamily="34" charset="-122"/>
                 <a:cs typeface="Apple SD Gothic Neo" pitchFamily="34" charset="-120"/>
               </a:rPr>
-              <a:t>효능 — 면역력 · 다이어트 · 피부 · 숙취</a:t>
-            </a:r>
-            <a:endParaRPr lang="en-US" sz="1300" dirty="0"/>
+              <a:t>예: "천연화장품"은 인증 기준 · "화학성분 없음"은 오인 표현</a:t>
+            </a:r>
+            <a:endParaRPr lang="en-US" sz="1250" dirty="0"/>
           </a:p>
           <a:p>
             <a:pPr indent="0" marL="0">
@@ -16045,18 +16423,7 @@
               </a:spcAft>
               <a:buNone/>
             </a:pPr>
-            <a:r>
-              <a:rPr lang="en-US" sz="1300" dirty="0">
-                <a:solidFill>
-                  <a:srgbClr val="6E6E6E"/>
-                </a:solidFill>
-                <a:latin typeface="Apple SD Gothic Neo" pitchFamily="34" charset="0"/>
-                <a:ea typeface="Apple SD Gothic Neo" pitchFamily="34" charset="-122"/>
-                <a:cs typeface="Apple SD Gothic Neo" pitchFamily="34" charset="-120"/>
-              </a:rPr>
-              <a:t>다른 가게 비교 · 비하</a:t>
-            </a:r>
-            <a:endParaRPr lang="en-US" sz="1300" dirty="0"/>
+            <a:endParaRPr lang="en-US" sz="1250" dirty="0"/>
           </a:p>
           <a:p>
             <a:pPr indent="0" marL="0">
@@ -16066,7 +16433,7 @@
               <a:buNone/>
             </a:pPr>
             <a:r>
-              <a:rPr lang="en-US" sz="1300" dirty="0">
+              <a:rPr lang="en-US" sz="1250" dirty="0">
                 <a:solidFill>
                   <a:srgbClr val="6E6E6E"/>
                 </a:solidFill>
@@ -16074,29 +16441,9 @@
                 <a:ea typeface="Apple SD Gothic Neo" pitchFamily="34" charset="-122"/>
                 <a:cs typeface="Apple SD Gothic Neo" pitchFamily="34" charset="-120"/>
               </a:rPr>
-              <a:t>시트에 없는 숫자</a:t>
-            </a:r>
-            <a:endParaRPr lang="en-US" sz="1300" dirty="0"/>
-          </a:p>
-          <a:p>
-            <a:pPr indent="0" marL="0">
-              <a:spcAft>
-                <a:spcPts val="400"/>
-              </a:spcAft>
-              <a:buNone/>
-            </a:pPr>
-            <a:r>
-              <a:rPr lang="en-US" sz="1300" dirty="0">
-                <a:solidFill>
-                  <a:srgbClr val="6E6E6E"/>
-                </a:solidFill>
-                <a:latin typeface="Apple SD Gothic Neo" pitchFamily="34" charset="0"/>
-                <a:ea typeface="Apple SD Gothic Neo" pitchFamily="34" charset="-122"/>
-                <a:cs typeface="Apple SD Gothic Neo" pitchFamily="34" charset="-120"/>
-              </a:rPr>
-              <a:t>없는 후기</a:t>
-            </a:r>
-            <a:endParaRPr lang="en-US" sz="1300" dirty="0"/>
+              <a:t>공통: 최초 · 최고 · 유일 · 1등 · 효능 · 비교 · 시트에 없는 숫자 · 없는 후기</a:t>
+            </a:r>
+            <a:endParaRPr lang="en-US" sz="1250" dirty="0"/>
           </a:p>
         </p:txBody>
       </p:sp>
@@ -17926,8 +18273,8 @@
         </p:nvSpPr>
         <p:spPr>
           <a:xfrm>
-            <a:off x="548640" y="4114800"/>
-            <a:ext cx="8046720" cy="457200"/>
+            <a:off x="548640" y="4023360"/>
+            <a:ext cx="8046720" cy="685800"/>
           </a:xfrm>
           <a:prstGeom prst="rect">
             <a:avLst/>
@@ -17943,7 +18290,7 @@
               <a:buNone/>
             </a:pPr>
             <a:r>
-              <a:rPr lang="en-US" sz="1300" b="1" dirty="0">
+              <a:rPr lang="en-US" sz="1250" b="1" dirty="0">
                 <a:solidFill>
                   <a:srgbClr val="E8622A"/>
                 </a:solidFill>
@@ -17953,7 +18300,24 @@
               </a:rPr>
               <a:t>채널이 이미 4개 이상이면 — 한 달 손 안 댈 채널 하나를 고른다. 세팅이 아니라 정리.</a:t>
             </a:r>
-            <a:endParaRPr lang="en-US" sz="1300" dirty="0"/>
+            <a:endParaRPr lang="en-US" sz="1250" dirty="0"/>
+          </a:p>
+          <a:p>
+            <a:pPr indent="0" marL="0">
+              <a:buNone/>
+            </a:pPr>
+            <a:r>
+              <a:rPr lang="en-US" sz="1250" b="1" dirty="0">
+                <a:solidFill>
+                  <a:srgbClr val="E8622A"/>
+                </a:solidFill>
+                <a:latin typeface="Apple SD Gothic Neo" pitchFamily="34" charset="0"/>
+                <a:ea typeface="Apple SD Gothic Neo" pitchFamily="34" charset="-122"/>
+                <a:cs typeface="Apple SD Gothic Neo" pitchFamily="34" charset="-120"/>
+              </a:rPr>
+              <a:t>[조사] 손님이 실제로 칠 검색어 5개 · 앞으로 석 달의 계기 3개를 찾아 이름 칸과 4주 테마에 넣는다.</a:t>
+            </a:r>
+            <a:endParaRPr lang="en-US" sz="1250" dirty="0"/>
           </a:p>
         </p:txBody>
       </p:sp>
@@ -21156,7 +21520,7 @@
                 <a:ea typeface="Apple SD Gothic Neo" pitchFamily="34" charset="-122"/>
                 <a:cs typeface="Apple SD Gothic Neo" pitchFamily="34" charset="-120"/>
               </a:rPr>
-              <a:t>파일 여섯 개 = 규칙 하나 + 재료 다섯</a:t>
+              <a:t>파일 다섯 개 = 재료. 규칙은 지침에 이미 있다</a:t>
             </a:r>
             <a:endParaRPr lang="en-US" sz="2800" dirty="0"/>
           </a:p>
@@ -21413,7 +21777,7 @@
                           <a:ea typeface="Apple SD Gothic Neo" pitchFamily="34" charset="-122"/>
                           <a:cs typeface="Apple SD Gothic Neo" pitchFamily="34" charset="-120"/>
                         </a:rPr>
-                        <a:t>00 프로젝트 지침</a:t>
+                        <a:t>(지침 — 오프닝에 붙인 것)</a:t>
                       </a:r>
                       <a:endParaRPr lang="en-US" sz="1200" dirty="0">
                         <a:latin typeface="Apple SD Gothic Neo" charset="0"/>
@@ -21549,7 +21913,7 @@
                           <a:ea typeface="Apple SD Gothic Neo" pitchFamily="34" charset="-122"/>
                           <a:cs typeface="Apple SD Gothic Neo" pitchFamily="34" charset="-120"/>
                         </a:rPr>
-                        <a:t>「지침」</a:t>
+                        <a:t>「지침」 이미 있음</a:t>
                       </a:r>
                       <a:endParaRPr lang="en-US" sz="1200" dirty="0">
                         <a:latin typeface="Apple SD Gothic Neo" charset="0"/>
@@ -22739,7 +23103,7 @@
                 <a:ea typeface="Apple SD Gothic Neo" pitchFamily="34" charset="-122"/>
                 <a:cs typeface="Apple SD Gothic Neo" pitchFamily="34" charset="-120"/>
               </a:rPr>
-              <a:t>블록 4 · ChatGPT 프로젝트 개설</a:t>
+              <a:t>블록 4 · 같은 프로젝트에 올리기</a:t>
             </a:r>
             <a:endParaRPr lang="en-US" sz="1100" dirty="0"/>
           </a:p>
@@ -22778,7 +23142,7 @@
                 <a:ea typeface="Apple SD Gothic Neo" pitchFamily="34" charset="-122"/>
                 <a:cs typeface="Apple SD Gothic Neo" pitchFamily="34" charset="-120"/>
               </a:rPr>
-              <a:t>다섯 단계</a:t>
+              <a:t>세 단계</a:t>
             </a:r>
             <a:endParaRPr lang="en-US" sz="2800" dirty="0"/>
           </a:p>
@@ -22881,7 +23245,7 @@
                 <a:ea typeface="Apple SD Gothic Neo" pitchFamily="34" charset="-122"/>
                 <a:cs typeface="Apple SD Gothic Neo" pitchFamily="34" charset="-120"/>
               </a:rPr>
-              <a:t>ChatGPT 왼쪽 「프로젝트」 → 「새 프로젝트」</a:t>
+              <a:t>인터뷰가 만든 01~05 다섯 파일을 내려받는다</a:t>
             </a:r>
             <a:endParaRPr lang="en-US" sz="1400" dirty="0"/>
           </a:p>
@@ -22984,7 +23348,7 @@
                 <a:ea typeface="Apple SD Gothic Neo" pitchFamily="34" charset="-122"/>
                 <a:cs typeface="Apple SD Gothic Neo" pitchFamily="34" charset="-120"/>
               </a:rPr>
-              <a:t>이름: 「(상호) 마케팅」</a:t>
+              <a:t>지금 이 프로젝트 → 「파일」 → 다섯 개 업로드</a:t>
             </a:r>
             <a:endParaRPr lang="en-US" sz="1400" dirty="0"/>
           </a:p>
@@ -23087,7 +23451,7 @@
                 <a:ea typeface="Apple SD Gothic Neo" pitchFamily="34" charset="-122"/>
                 <a:cs typeface="Apple SD Gothic Neo" pitchFamily="34" charset="-120"/>
               </a:rPr>
-              <a:t>「지침」 열기 → 00 파일 내용 전부 붙여넣기 → 저장</a:t>
+              <a:t>새 대화 → 테스트 질문. 올라가면 지침이 스스로 마케팅 모드로 바뀐다</a:t>
             </a:r>
             <a:endParaRPr lang="en-US" sz="1400" dirty="0"/>
           </a:p>
@@ -23096,212 +23460,6 @@
       <p:sp>
         <p:nvSpPr>
           <p:cNvPr id="14" name="Shape 12"/>
-          <p:cNvSpPr/>
-          <p:nvPr/>
-        </p:nvSpPr>
-        <p:spPr>
-          <a:xfrm>
-            <a:off x="548640" y="3154680"/>
-            <a:ext cx="411480" cy="411480"/>
-          </a:xfrm>
-          <a:prstGeom prst="ellipse">
-            <a:avLst/>
-          </a:prstGeom>
-          <a:solidFill>
-            <a:srgbClr val="E8622A"/>
-          </a:solidFill>
-          <a:ln w="12700">
-            <a:solidFill>
-              <a:srgbClr val="E8622A"/>
-            </a:solidFill>
-            <a:prstDash val="solid"/>
-          </a:ln>
-        </p:spPr>
-      </p:sp>
-      <p:sp>
-        <p:nvSpPr>
-          <p:cNvPr id="15" name="Text 13"/>
-          <p:cNvSpPr txBox="1"/>
-          <p:nvPr/>
-        </p:nvSpPr>
-        <p:spPr>
-          <a:xfrm>
-            <a:off x="548640" y="3154680"/>
-            <a:ext cx="411480" cy="411480"/>
-          </a:xfrm>
-          <a:prstGeom prst="rect">
-            <a:avLst/>
-          </a:prstGeom>
-          <a:noFill/>
-          <a:ln/>
-        </p:spPr>
-        <p:txBody>
-          <a:bodyPr wrap="square" lIns="0" tIns="0" rIns="0" bIns="0" rtlCol="0" anchor="ctr"/>
-          <a:lstStyle/>
-          <a:p>
-            <a:pPr algn="ctr" indent="0" marL="0">
-              <a:buNone/>
-            </a:pPr>
-            <a:r>
-              <a:rPr lang="en-US" sz="1300" b="1" dirty="0">
-                <a:solidFill>
-                  <a:srgbClr val="FFFFFF"/>
-                </a:solidFill>
-                <a:latin typeface="Apple SD Gothic Neo" pitchFamily="34" charset="0"/>
-                <a:ea typeface="Apple SD Gothic Neo" pitchFamily="34" charset="-122"/>
-                <a:cs typeface="Apple SD Gothic Neo" pitchFamily="34" charset="-120"/>
-              </a:rPr>
-              <a:t>4</a:t>
-            </a:r>
-            <a:endParaRPr lang="en-US" sz="1300" dirty="0"/>
-          </a:p>
-        </p:txBody>
-      </p:sp>
-      <p:sp>
-        <p:nvSpPr>
-          <p:cNvPr id="16" name="Text 14"/>
-          <p:cNvSpPr txBox="1"/>
-          <p:nvPr/>
-        </p:nvSpPr>
-        <p:spPr>
-          <a:xfrm>
-            <a:off x="1143000" y="3108960"/>
-            <a:ext cx="4572000" cy="502920"/>
-          </a:xfrm>
-          <a:prstGeom prst="rect">
-            <a:avLst/>
-          </a:prstGeom>
-          <a:noFill/>
-          <a:ln/>
-        </p:spPr>
-        <p:txBody>
-          <a:bodyPr wrap="square" lIns="0" tIns="0" rIns="0" bIns="0" rtlCol="0" anchor="ctr"/>
-          <a:lstStyle/>
-          <a:p>
-            <a:pPr indent="0" marL="0">
-              <a:buNone/>
-            </a:pPr>
-            <a:r>
-              <a:rPr lang="en-US" sz="1400" dirty="0">
-                <a:solidFill>
-                  <a:srgbClr val="222222"/>
-                </a:solidFill>
-                <a:latin typeface="Apple SD Gothic Neo" pitchFamily="34" charset="0"/>
-                <a:ea typeface="Apple SD Gothic Neo" pitchFamily="34" charset="-122"/>
-                <a:cs typeface="Apple SD Gothic Neo" pitchFamily="34" charset="-120"/>
-              </a:rPr>
-              <a:t>「파일」 → 01~05 다섯 개 업로드</a:t>
-            </a:r>
-            <a:endParaRPr lang="en-US" sz="1400" dirty="0"/>
-          </a:p>
-        </p:txBody>
-      </p:sp>
-      <p:sp>
-        <p:nvSpPr>
-          <p:cNvPr id="17" name="Shape 15"/>
-          <p:cNvSpPr/>
-          <p:nvPr/>
-        </p:nvSpPr>
-        <p:spPr>
-          <a:xfrm>
-            <a:off x="548640" y="3703320"/>
-            <a:ext cx="411480" cy="411480"/>
-          </a:xfrm>
-          <a:prstGeom prst="ellipse">
-            <a:avLst/>
-          </a:prstGeom>
-          <a:solidFill>
-            <a:srgbClr val="E8622A"/>
-          </a:solidFill>
-          <a:ln w="12700">
-            <a:solidFill>
-              <a:srgbClr val="E8622A"/>
-            </a:solidFill>
-            <a:prstDash val="solid"/>
-          </a:ln>
-        </p:spPr>
-      </p:sp>
-      <p:sp>
-        <p:nvSpPr>
-          <p:cNvPr id="18" name="Text 16"/>
-          <p:cNvSpPr txBox="1"/>
-          <p:nvPr/>
-        </p:nvSpPr>
-        <p:spPr>
-          <a:xfrm>
-            <a:off x="548640" y="3703320"/>
-            <a:ext cx="411480" cy="411480"/>
-          </a:xfrm>
-          <a:prstGeom prst="rect">
-            <a:avLst/>
-          </a:prstGeom>
-          <a:noFill/>
-          <a:ln/>
-        </p:spPr>
-        <p:txBody>
-          <a:bodyPr wrap="square" lIns="0" tIns="0" rIns="0" bIns="0" rtlCol="0" anchor="ctr"/>
-          <a:lstStyle/>
-          <a:p>
-            <a:pPr algn="ctr" indent="0" marL="0">
-              <a:buNone/>
-            </a:pPr>
-            <a:r>
-              <a:rPr lang="en-US" sz="1300" b="1" dirty="0">
-                <a:solidFill>
-                  <a:srgbClr val="FFFFFF"/>
-                </a:solidFill>
-                <a:latin typeface="Apple SD Gothic Neo" pitchFamily="34" charset="0"/>
-                <a:ea typeface="Apple SD Gothic Neo" pitchFamily="34" charset="-122"/>
-                <a:cs typeface="Apple SD Gothic Neo" pitchFamily="34" charset="-120"/>
-              </a:rPr>
-              <a:t>5</a:t>
-            </a:r>
-            <a:endParaRPr lang="en-US" sz="1300" dirty="0"/>
-          </a:p>
-        </p:txBody>
-      </p:sp>
-      <p:sp>
-        <p:nvSpPr>
-          <p:cNvPr id="19" name="Text 17"/>
-          <p:cNvSpPr txBox="1"/>
-          <p:nvPr/>
-        </p:nvSpPr>
-        <p:spPr>
-          <a:xfrm>
-            <a:off x="1143000" y="3657600"/>
-            <a:ext cx="4572000" cy="502920"/>
-          </a:xfrm>
-          <a:prstGeom prst="rect">
-            <a:avLst/>
-          </a:prstGeom>
-          <a:noFill/>
-          <a:ln/>
-        </p:spPr>
-        <p:txBody>
-          <a:bodyPr wrap="square" lIns="0" tIns="0" rIns="0" bIns="0" rtlCol="0" anchor="ctr"/>
-          <a:lstStyle/>
-          <a:p>
-            <a:pPr indent="0" marL="0">
-              <a:buNone/>
-            </a:pPr>
-            <a:r>
-              <a:rPr lang="en-US" sz="1400" dirty="0">
-                <a:solidFill>
-                  <a:srgbClr val="222222"/>
-                </a:solidFill>
-                <a:latin typeface="Apple SD Gothic Neo" pitchFamily="34" charset="0"/>
-                <a:ea typeface="Apple SD Gothic Neo" pitchFamily="34" charset="-122"/>
-                <a:cs typeface="Apple SD Gothic Neo" pitchFamily="34" charset="-120"/>
-              </a:rPr>
-              <a:t>프로젝트 안에서 새 대화 → 테스트 질문</a:t>
-            </a:r>
-            <a:endParaRPr lang="en-US" sz="1400" dirty="0"/>
-          </a:p>
-        </p:txBody>
-      </p:sp>
-      <p:sp>
-        <p:nvSpPr>
-          <p:cNvPr id="20" name="Shape 18"/>
           <p:cNvSpPr/>
           <p:nvPr/>
         </p:nvSpPr>
@@ -23328,7 +23486,7 @@
       </p:sp>
       <p:sp>
         <p:nvSpPr>
-          <p:cNvPr id="21" name="Text 19"/>
+          <p:cNvPr id="15" name="Text 13"/>
           <p:cNvSpPr txBox="1"/>
           <p:nvPr/>
         </p:nvSpPr>
@@ -23384,7 +23542,7 @@
       </p:sp>
       <p:sp>
         <p:nvSpPr>
-          <p:cNvPr id="22" name="Text 20"/>
+          <p:cNvPr id="16" name="Text 14"/>
           <p:cNvSpPr txBox="1"/>
           <p:nvPr/>
         </p:nvSpPr>
@@ -23415,7 +23573,7 @@
                 <a:ea typeface="Apple SD Gothic Neo" pitchFamily="34" charset="-122"/>
                 <a:cs typeface="Apple SD Gothic Neo" pitchFamily="34" charset="-120"/>
               </a:rPr>
-              <a:t>무료 계정에서 파일이 다 안 올라가면 01 · 02 · 03 먼저. 04 · 05는 대화에 첨부.</a:t>
+              <a:t>무료 계정에서 한도에 걸리면 참조 묶음을 지우고 올린다. 인터뷰는 끝났으니 없어도 된다.</a:t>
             </a:r>
             <a:endParaRPr lang="en-US" sz="1250" dirty="0"/>
           </a:p>
@@ -24161,7 +24319,7 @@
                           <a:ea typeface="Apple SD Gothic Neo" pitchFamily="34" charset="-122"/>
                           <a:cs typeface="Apple SD Gothic Neo" pitchFamily="34" charset="-120"/>
                         </a:rPr>
-                        <a:t>지침이 안 붙었거나 03이 안 올라감</a:t>
+                        <a:t>03이 안 올라감</a:t>
                       </a:r>
                       <a:endParaRPr lang="en-US" sz="1200" dirty="0">
                         <a:latin typeface="Apple SD Gothic Neo" charset="0"/>
@@ -24229,7 +24387,7 @@
                           <a:ea typeface="Apple SD Gothic Neo" pitchFamily="34" charset="-122"/>
                           <a:cs typeface="Apple SD Gothic Neo" pitchFamily="34" charset="-120"/>
                         </a:rPr>
-                        <a:t>지침 · 03 확인</a:t>
+                        <a:t>03 확인</a:t>
                       </a:r>
                       <a:endParaRPr lang="en-US" sz="1200" dirty="0">
                         <a:latin typeface="Apple SD Gothic Neo" charset="0"/>
@@ -24277,6 +24435,212 @@
                     </a:lnB>
                     <a:solidFill>
                       <a:srgbClr val="F3F2EF"/>
+                    </a:solidFill>
+                  </a:tcPr>
+                </a:tc>
+              </a:tr>
+              <a:tr h="365760">
+                <a:tc>
+                  <a:txBody>
+                    <a:bodyPr/>
+                    <a:lstStyle/>
+                    <a:p>
+                      <a:pPr algn="l" indent="0" marL="0">
+                        <a:buNone/>
+                      </a:pPr>
+                      <a:r>
+                        <a:rPr lang="en-US" sz="1200" dirty="0">
+                          <a:solidFill>
+                            <a:srgbClr val="222222"/>
+                          </a:solidFill>
+                          <a:latin typeface="Apple SD Gothic Neo" pitchFamily="34" charset="0"/>
+                          <a:ea typeface="Apple SD Gothic Neo" pitchFamily="34" charset="-122"/>
+                          <a:cs typeface="Apple SD Gothic Neo" pitchFamily="34" charset="-120"/>
+                        </a:rPr>
+                        <a:t>여전히 인터뷰 질문을 함</a:t>
+                      </a:r>
+                      <a:endParaRPr lang="en-US" sz="1200" dirty="0">
+                        <a:latin typeface="Apple SD Gothic Neo" charset="0"/>
+                        <a:ea typeface="Apple SD Gothic Neo" charset="0"/>
+                        <a:cs typeface="Apple SD Gothic Neo" charset="0"/>
+                      </a:endParaRPr>
+                    </a:p>
+                  </a:txBody>
+                  <a:tcPr marL="76200" marR="76200" marT="50800" marB="50800" anchor="ctr">
+                    <a:lnL w="6350" cap="flat" cmpd="sng" algn="ctr">
+                      <a:solidFill>
+                        <a:srgbClr val="DDDAD4"/>
+                      </a:solidFill>
+                      <a:prstDash val="solid"/>
+                      <a:round/>
+                      <a:headEnd type="none" w="med" len="med"/>
+                      <a:tailEnd type="none" w="med" len="med"/>
+                    </a:lnL>
+                    <a:lnR w="6350" cap="flat" cmpd="sng" algn="ctr">
+                      <a:solidFill>
+                        <a:srgbClr val="DDDAD4"/>
+                      </a:solidFill>
+                      <a:prstDash val="solid"/>
+                      <a:round/>
+                      <a:headEnd type="none" w="med" len="med"/>
+                      <a:tailEnd type="none" w="med" len="med"/>
+                    </a:lnR>
+                    <a:lnT w="6350" cap="flat" cmpd="sng" algn="ctr">
+                      <a:solidFill>
+                        <a:srgbClr val="DDDAD4"/>
+                      </a:solidFill>
+                      <a:prstDash val="solid"/>
+                      <a:round/>
+                      <a:headEnd type="none" w="med" len="med"/>
+                      <a:tailEnd type="none" w="med" len="med"/>
+                    </a:lnT>
+                    <a:lnB w="6350" cap="flat" cmpd="sng" algn="ctr">
+                      <a:solidFill>
+                        <a:srgbClr val="DDDAD4"/>
+                      </a:solidFill>
+                      <a:prstDash val="solid"/>
+                      <a:round/>
+                      <a:headEnd type="none" w="med" len="med"/>
+                      <a:tailEnd type="none" w="med" len="med"/>
+                    </a:lnB>
+                    <a:solidFill>
+                      <a:srgbClr val="FFFFFF"/>
+                    </a:solidFill>
+                  </a:tcPr>
+                </a:tc>
+                <a:tc>
+                  <a:txBody>
+                    <a:bodyPr/>
+                    <a:lstStyle/>
+                    <a:p>
+                      <a:pPr algn="l" indent="0" marL="0">
+                        <a:buNone/>
+                      </a:pPr>
+                      <a:r>
+                        <a:rPr lang="en-US" sz="1200" dirty="0">
+                          <a:solidFill>
+                            <a:srgbClr val="222222"/>
+                          </a:solidFill>
+                          <a:latin typeface="Apple SD Gothic Neo" pitchFamily="34" charset="0"/>
+                          <a:ea typeface="Apple SD Gothic Neo" pitchFamily="34" charset="-122"/>
+                          <a:cs typeface="Apple SD Gothic Neo" pitchFamily="34" charset="-120"/>
+                        </a:rPr>
+                        <a:t>파일 이름이 다르거나 덜 올라감</a:t>
+                      </a:r>
+                      <a:endParaRPr lang="en-US" sz="1200" dirty="0">
+                        <a:latin typeface="Apple SD Gothic Neo" charset="0"/>
+                        <a:ea typeface="Apple SD Gothic Neo" charset="0"/>
+                        <a:cs typeface="Apple SD Gothic Neo" charset="0"/>
+                      </a:endParaRPr>
+                    </a:p>
+                  </a:txBody>
+                  <a:tcPr marL="76200" marR="76200" marT="50800" marB="50800" anchor="ctr">
+                    <a:lnL w="6350" cap="flat" cmpd="sng" algn="ctr">
+                      <a:solidFill>
+                        <a:srgbClr val="DDDAD4"/>
+                      </a:solidFill>
+                      <a:prstDash val="solid"/>
+                      <a:round/>
+                      <a:headEnd type="none" w="med" len="med"/>
+                      <a:tailEnd type="none" w="med" len="med"/>
+                    </a:lnL>
+                    <a:lnR w="6350" cap="flat" cmpd="sng" algn="ctr">
+                      <a:solidFill>
+                        <a:srgbClr val="DDDAD4"/>
+                      </a:solidFill>
+                      <a:prstDash val="solid"/>
+                      <a:round/>
+                      <a:headEnd type="none" w="med" len="med"/>
+                      <a:tailEnd type="none" w="med" len="med"/>
+                    </a:lnR>
+                    <a:lnT w="6350" cap="flat" cmpd="sng" algn="ctr">
+                      <a:solidFill>
+                        <a:srgbClr val="DDDAD4"/>
+                      </a:solidFill>
+                      <a:prstDash val="solid"/>
+                      <a:round/>
+                      <a:headEnd type="none" w="med" len="med"/>
+                      <a:tailEnd type="none" w="med" len="med"/>
+                    </a:lnT>
+                    <a:lnB w="6350" cap="flat" cmpd="sng" algn="ctr">
+                      <a:solidFill>
+                        <a:srgbClr val="DDDAD4"/>
+                      </a:solidFill>
+                      <a:prstDash val="solid"/>
+                      <a:round/>
+                      <a:headEnd type="none" w="med" len="med"/>
+                      <a:tailEnd type="none" w="med" len="med"/>
+                    </a:lnB>
+                    <a:solidFill>
+                      <a:srgbClr val="FFFFFF"/>
+                    </a:solidFill>
+                  </a:tcPr>
+                </a:tc>
+                <a:tc>
+                  <a:txBody>
+                    <a:bodyPr/>
+                    <a:lstStyle/>
+                    <a:p>
+                      <a:pPr algn="l" indent="0" marL="0">
+                        <a:buNone/>
+                      </a:pPr>
+                      <a:r>
+                        <a:rPr lang="en-US" sz="1200" dirty="0">
+                          <a:solidFill>
+                            <a:srgbClr val="222222"/>
+                          </a:solidFill>
+                          <a:latin typeface="Apple SD Gothic Neo" pitchFamily="34" charset="0"/>
+                          <a:ea typeface="Apple SD Gothic Neo" pitchFamily="34" charset="-122"/>
+                          <a:cs typeface="Apple SD Gothic Neo" pitchFamily="34" charset="-120"/>
+                        </a:rPr>
+                        <a:t>01~05 파일명 확인</a:t>
+                      </a:r>
+                      <a:endParaRPr lang="en-US" sz="1200" dirty="0">
+                        <a:latin typeface="Apple SD Gothic Neo" charset="0"/>
+                        <a:ea typeface="Apple SD Gothic Neo" charset="0"/>
+                        <a:cs typeface="Apple SD Gothic Neo" charset="0"/>
+                      </a:endParaRPr>
+                    </a:p>
+                  </a:txBody>
+                  <a:tcPr marL="76200" marR="76200" marT="50800" marB="50800" anchor="ctr">
+                    <a:lnL w="6350" cap="flat" cmpd="sng" algn="ctr">
+                      <a:solidFill>
+                        <a:srgbClr val="DDDAD4"/>
+                      </a:solidFill>
+                      <a:prstDash val="solid"/>
+                      <a:round/>
+                      <a:headEnd type="none" w="med" len="med"/>
+                      <a:tailEnd type="none" w="med" len="med"/>
+                    </a:lnL>
+                    <a:lnR w="6350" cap="flat" cmpd="sng" algn="ctr">
+                      <a:solidFill>
+                        <a:srgbClr val="DDDAD4"/>
+                      </a:solidFill>
+                      <a:prstDash val="solid"/>
+                      <a:round/>
+                      <a:headEnd type="none" w="med" len="med"/>
+                      <a:tailEnd type="none" w="med" len="med"/>
+                    </a:lnR>
+                    <a:lnT w="6350" cap="flat" cmpd="sng" algn="ctr">
+                      <a:solidFill>
+                        <a:srgbClr val="DDDAD4"/>
+                      </a:solidFill>
+                      <a:prstDash val="solid"/>
+                      <a:round/>
+                      <a:headEnd type="none" w="med" len="med"/>
+                      <a:tailEnd type="none" w="med" len="med"/>
+                    </a:lnT>
+                    <a:lnB w="6350" cap="flat" cmpd="sng" algn="ctr">
+                      <a:solidFill>
+                        <a:srgbClr val="DDDAD4"/>
+                      </a:solidFill>
+                      <a:prstDash val="solid"/>
+                      <a:round/>
+                      <a:headEnd type="none" w="med" len="med"/>
+                      <a:tailEnd type="none" w="med" len="med"/>
+                    </a:lnB>
+                    <a:solidFill>
+                      <a:srgbClr val="FFFFFF"/>
                     </a:solidFill>
                   </a:tcPr>
                 </a:tc>
@@ -24346,7 +24710,7 @@
                       <a:tailEnd type="none" w="med" len="med"/>
                     </a:lnB>
                     <a:solidFill>
-                      <a:srgbClr val="FFFFFF"/>
+                      <a:srgbClr val="F3F2EF"/>
                     </a:solidFill>
                   </a:tcPr>
                 </a:tc>
@@ -24414,7 +24778,7 @@
                       <a:tailEnd type="none" w="med" len="med"/>
                     </a:lnB>
                     <a:solidFill>
-                      <a:srgbClr val="FFFFFF"/>
+                      <a:srgbClr val="F3F2EF"/>
                     </a:solidFill>
                   </a:tcPr>
                 </a:tc>
@@ -24482,7 +24846,7 @@
                       <a:tailEnd type="none" w="med" len="med"/>
                     </a:lnB>
                     <a:solidFill>
-                      <a:srgbClr val="FFFFFF"/>
+                      <a:srgbClr val="F3F2EF"/>
                     </a:solidFill>
                   </a:tcPr>
                 </a:tc>
@@ -24552,7 +24916,7 @@
                       <a:tailEnd type="none" w="med" len="med"/>
                     </a:lnB>
                     <a:solidFill>
-                      <a:srgbClr val="F3F2EF"/>
+                      <a:srgbClr val="FFFFFF"/>
                     </a:solidFill>
                   </a:tcPr>
                 </a:tc>
@@ -24620,7 +24984,7 @@
                       <a:tailEnd type="none" w="med" len="med"/>
                     </a:lnB>
                     <a:solidFill>
-                      <a:srgbClr val="F3F2EF"/>
+                      <a:srgbClr val="FFFFFF"/>
                     </a:solidFill>
                   </a:tcPr>
                 </a:tc>
@@ -24688,7 +25052,7 @@
                       <a:tailEnd type="none" w="med" len="med"/>
                     </a:lnB>
                     <a:solidFill>
-                      <a:srgbClr val="F3F2EF"/>
+                      <a:srgbClr val="FFFFFF"/>
                     </a:solidFill>
                   </a:tcPr>
                 </a:tc>
@@ -36066,7 +36430,7 @@
                 <a:ea typeface="Apple SD Gothic Neo" pitchFamily="34" charset="-122"/>
                 <a:cs typeface="Apple SD Gothic Neo" pitchFamily="34" charset="-120"/>
               </a:rPr>
-              <a:t>지침 1 + 파일 5 · 소개 이미지</a:t>
+              <a:t>파일 5 · 소개 이미지</a:t>
             </a:r>
             <a:endParaRPr lang="en-US" sz="1150" dirty="0"/>
           </a:p>
@@ -40596,7 +40960,7 @@
                 <a:ea typeface="Apple SD Gothic Neo" pitchFamily="34" charset="-122"/>
                 <a:cs typeface="Apple SD Gothic Neo" pitchFamily="34" charset="-120"/>
               </a:rPr>
-              <a:t>오늘 만나는 스킬은 둘</a:t>
+              <a:t>스킬은 하나, 프로젝트도 하나 — 두 번 만난다</a:t>
             </a:r>
             <a:endParaRPr lang="en-US" sz="2800" dirty="0"/>
           </a:p>
@@ -40662,7 +41026,7 @@
                 <a:ea typeface="Apple SD Gothic Neo" pitchFamily="34" charset="-122"/>
                 <a:cs typeface="Apple SD Gothic Neo" pitchFamily="34" charset="-120"/>
               </a:rPr>
-              <a:t>커스텀 GPT 「비즈니스 GTM 코어」</a:t>
+              <a:t>오전 — 지침이 질문한다</a:t>
             </a:r>
             <a:endParaRPr lang="en-US" sz="1500" dirty="0"/>
           </a:p>
@@ -40704,7 +41068,7 @@
                 <a:ea typeface="Apple SD Gothic Neo" pitchFamily="34" charset="-122"/>
                 <a:cs typeface="Apple SD Gothic Neo" pitchFamily="34" charset="-120"/>
               </a:rPr>
-              <a:t>강사가 만든 스킬</a:t>
+              <a:t>강사가 넣어드린 지침 + 참조 묶음</a:t>
             </a:r>
             <a:endParaRPr lang="en-US" sz="1250" dirty="0"/>
           </a:p>
@@ -40724,7 +41088,7 @@
                 <a:ea typeface="Apple SD Gothic Neo" pitchFamily="34" charset="-122"/>
                 <a:cs typeface="Apple SD Gothic Neo" pitchFamily="34" charset="-120"/>
               </a:rPr>
-              <a:t>20개 질문을 순서대로 던지고 파일 여섯 개를 만든다</a:t>
+              <a:t>20개 질문을 순서대로 던지고 파일 다섯 개를 만든다</a:t>
             </a:r>
             <a:endParaRPr lang="en-US" sz="1250" dirty="0"/>
           </a:p>
@@ -40773,7 +41137,7 @@
                 <a:ea typeface="Apple SD Gothic Neo" pitchFamily="34" charset="-122"/>
                 <a:cs typeface="Apple SD Gothic Neo" pitchFamily="34" charset="-120"/>
               </a:rPr>
-              <a:t>→ 오전에 쓴다</a:t>
+              <a:t>→ 인터뷰 모드</a:t>
             </a:r>
             <a:endParaRPr lang="en-US" sz="1250" dirty="0"/>
           </a:p>
@@ -40839,7 +41203,7 @@
                 <a:ea typeface="Apple SD Gothic Neo" pitchFamily="34" charset="-122"/>
                 <a:cs typeface="Apple SD Gothic Neo" pitchFamily="34" charset="-120"/>
               </a:rPr>
-              <a:t>「(상호) 마케팅」 프로젝트</a:t>
+              <a:t>오후 — 파일이 쌓이면 동료가 된다</a:t>
             </a:r>
             <a:endParaRPr lang="en-US" sz="1500" dirty="0"/>
           </a:p>
@@ -40881,7 +41245,7 @@
                 <a:ea typeface="Apple SD Gothic Neo" pitchFamily="34" charset="-122"/>
                 <a:cs typeface="Apple SD Gothic Neo" pitchFamily="34" charset="-120"/>
               </a:rPr>
-              <a:t>여러분이 만드는 내 첫 스킬</a:t>
+              <a:t>여러분 답이 파일 01~05로 같은 프로젝트에 올라간다</a:t>
             </a:r>
             <a:endParaRPr lang="en-US" sz="1250" dirty="0"/>
           </a:p>
@@ -40901,7 +41265,7 @@
                 <a:ea typeface="Apple SD Gothic Neo" pitchFamily="34" charset="-122"/>
                 <a:cs typeface="Apple SD Gothic Neo" pitchFamily="34" charset="-120"/>
               </a:rPr>
-              <a:t>우리 STIC이 든 지침 1 + 파일 5</a:t>
+              <a:t>같은 지침이 알아서 마케팅 모드로 바뀐다</a:t>
             </a:r>
             <a:endParaRPr lang="en-US" sz="1250" dirty="0"/>
           </a:p>
@@ -40950,7 +41314,7 @@
                 <a:ea typeface="Apple SD Gothic Neo" pitchFamily="34" charset="-122"/>
                 <a:cs typeface="Apple SD Gothic Neo" pitchFamily="34" charset="-120"/>
               </a:rPr>
-              <a:t>→ 오후에 만든다</a:t>
+              <a:t>→ 마케팅 모드</a:t>
             </a:r>
             <a:endParaRPr lang="en-US" sz="1250" dirty="0"/>
           </a:p>
